--- a/ゲーム科3年/00_前期/オンラインゲームプログラミングⅡ/08_ゲーム制作課題.pptx
+++ b/ゲーム科3年/00_前期/オンラインゲームプログラミングⅡ/08_ゲーム制作課題.pptx
@@ -6,7 +6,6 @@
   </p:sldMasterIdLst>
   <p:sldIdLst>
     <p:sldId id="256" r:id="rId2"/>
-    <p:sldId id="257" r:id="rId3"/>
   </p:sldIdLst>
   <p:sldSz cx="12192000" cy="6858000"/>
   <p:notesSz cx="6858000" cy="9144000"/>
@@ -260,7 +259,7 @@
           <a:p>
             <a:fld id="{E9CC885B-4903-4D54-9A93-00025F12DED9}" type="datetimeFigureOut">
               <a:rPr kumimoji="1" lang="ja-JP" altLang="en-US" smtClean="0"/>
-              <a:t>2026/8/6</a:t>
+              <a:t>2026/8/26</a:t>
             </a:fld>
             <a:endParaRPr kumimoji="1" lang="ja-JP" altLang="en-US"/>
           </a:p>
@@ -490,7 +489,7 @@
           <a:p>
             <a:fld id="{E9CC885B-4903-4D54-9A93-00025F12DED9}" type="datetimeFigureOut">
               <a:rPr kumimoji="1" lang="ja-JP" altLang="en-US" smtClean="0"/>
-              <a:t>2026/8/6</a:t>
+              <a:t>2026/8/26</a:t>
             </a:fld>
             <a:endParaRPr kumimoji="1" lang="ja-JP" altLang="en-US"/>
           </a:p>
@@ -730,7 +729,7 @@
           <a:p>
             <a:fld id="{E9CC885B-4903-4D54-9A93-00025F12DED9}" type="datetimeFigureOut">
               <a:rPr kumimoji="1" lang="ja-JP" altLang="en-US" smtClean="0"/>
-              <a:t>2026/8/6</a:t>
+              <a:t>2026/8/26</a:t>
             </a:fld>
             <a:endParaRPr kumimoji="1" lang="ja-JP" altLang="en-US"/>
           </a:p>
@@ -960,7 +959,7 @@
           <a:p>
             <a:fld id="{E9CC885B-4903-4D54-9A93-00025F12DED9}" type="datetimeFigureOut">
               <a:rPr kumimoji="1" lang="ja-JP" altLang="en-US" smtClean="0"/>
-              <a:t>2026/8/6</a:t>
+              <a:t>2026/8/26</a:t>
             </a:fld>
             <a:endParaRPr kumimoji="1" lang="ja-JP" altLang="en-US"/>
           </a:p>
@@ -1235,7 +1234,7 @@
           <a:p>
             <a:fld id="{E9CC885B-4903-4D54-9A93-00025F12DED9}" type="datetimeFigureOut">
               <a:rPr kumimoji="1" lang="ja-JP" altLang="en-US" smtClean="0"/>
-              <a:t>2026/8/6</a:t>
+              <a:t>2026/8/26</a:t>
             </a:fld>
             <a:endParaRPr kumimoji="1" lang="ja-JP" altLang="en-US"/>
           </a:p>
@@ -1564,7 +1563,7 @@
           <a:p>
             <a:fld id="{E9CC885B-4903-4D54-9A93-00025F12DED9}" type="datetimeFigureOut">
               <a:rPr kumimoji="1" lang="ja-JP" altLang="en-US" smtClean="0"/>
-              <a:t>2026/8/6</a:t>
+              <a:t>2026/8/26</a:t>
             </a:fld>
             <a:endParaRPr kumimoji="1" lang="ja-JP" altLang="en-US"/>
           </a:p>
@@ -2040,7 +2039,7 @@
           <a:p>
             <a:fld id="{E9CC885B-4903-4D54-9A93-00025F12DED9}" type="datetimeFigureOut">
               <a:rPr kumimoji="1" lang="ja-JP" altLang="en-US" smtClean="0"/>
-              <a:t>2026/8/6</a:t>
+              <a:t>2026/8/26</a:t>
             </a:fld>
             <a:endParaRPr kumimoji="1" lang="ja-JP" altLang="en-US"/>
           </a:p>
@@ -2181,7 +2180,7 @@
           <a:p>
             <a:fld id="{E9CC885B-4903-4D54-9A93-00025F12DED9}" type="datetimeFigureOut">
               <a:rPr kumimoji="1" lang="ja-JP" altLang="en-US" smtClean="0"/>
-              <a:t>2026/8/6</a:t>
+              <a:t>2026/8/26</a:t>
             </a:fld>
             <a:endParaRPr kumimoji="1" lang="ja-JP" altLang="en-US"/>
           </a:p>
@@ -2294,7 +2293,7 @@
           <a:p>
             <a:fld id="{E9CC885B-4903-4D54-9A93-00025F12DED9}" type="datetimeFigureOut">
               <a:rPr kumimoji="1" lang="ja-JP" altLang="en-US" smtClean="0"/>
-              <a:t>2026/8/6</a:t>
+              <a:t>2026/8/26</a:t>
             </a:fld>
             <a:endParaRPr kumimoji="1" lang="ja-JP" altLang="en-US"/>
           </a:p>
@@ -2637,7 +2636,7 @@
           <a:p>
             <a:fld id="{E9CC885B-4903-4D54-9A93-00025F12DED9}" type="datetimeFigureOut">
               <a:rPr kumimoji="1" lang="ja-JP" altLang="en-US" smtClean="0"/>
-              <a:t>2026/8/6</a:t>
+              <a:t>2026/8/26</a:t>
             </a:fld>
             <a:endParaRPr kumimoji="1" lang="ja-JP" altLang="en-US"/>
           </a:p>
@@ -2925,7 +2924,7 @@
           <a:p>
             <a:fld id="{E9CC885B-4903-4D54-9A93-00025F12DED9}" type="datetimeFigureOut">
               <a:rPr kumimoji="1" lang="ja-JP" altLang="en-US" smtClean="0"/>
-              <a:t>2026/8/6</a:t>
+              <a:t>2026/8/26</a:t>
             </a:fld>
             <a:endParaRPr kumimoji="1" lang="ja-JP" altLang="en-US"/>
           </a:p>
@@ -3198,7 +3197,7 @@
           <a:p>
             <a:fld id="{E9CC885B-4903-4D54-9A93-00025F12DED9}" type="datetimeFigureOut">
               <a:rPr kumimoji="1" lang="ja-JP" altLang="en-US" smtClean="0"/>
-              <a:t>2026/8/6</a:t>
+              <a:t>2026/8/26</a:t>
             </a:fld>
             <a:endParaRPr kumimoji="1" lang="ja-JP" altLang="en-US"/>
           </a:p>
@@ -3630,7 +3629,7 @@
         <p:spPr>
           <a:xfrm>
             <a:off x="567542" y="491954"/>
-            <a:ext cx="2646878" cy="584775"/>
+            <a:ext cx="3057247" cy="584775"/>
           </a:xfrm>
           <a:prstGeom prst="rect">
             <a:avLst/>
@@ -3645,7 +3644,7 @@
           <a:p>
             <a:r>
               <a:rPr kumimoji="1" lang="ja-JP" altLang="en-US" sz="3200" b="1" u="sng" dirty="0"/>
-              <a:t>イベント同期</a:t>
+              <a:t>ゲーム制作課題</a:t>
             </a:r>
           </a:p>
         </p:txBody>
@@ -3665,7 +3664,7 @@
         <p:spPr>
           <a:xfrm>
             <a:off x="567542" y="1216429"/>
-            <a:ext cx="10956846" cy="3416320"/>
+            <a:ext cx="8701421" cy="1200329"/>
           </a:xfrm>
           <a:prstGeom prst="rect">
             <a:avLst/>
@@ -3679,76 +3678,30 @@
           <a:lstStyle/>
           <a:p>
             <a:r>
+              <a:rPr lang="en-US" altLang="ja-JP" sz="2400" dirty="0"/>
+              <a:t>Unity</a:t>
+            </a:r>
+            <a:r>
               <a:rPr lang="ja-JP" altLang="en-US" sz="2400" dirty="0"/>
-              <a:t>弾丸やエネミーなど、</a:t>
+              <a:t>でオンラインゲームを制作しましょう。</a:t>
             </a:r>
             <a:endParaRPr lang="en-US" altLang="ja-JP" sz="2400" dirty="0"/>
           </a:p>
           <a:p>
             <a:r>
+              <a:rPr lang="en-US" altLang="ja-JP" sz="2400" dirty="0" err="1"/>
+              <a:t>DxLib</a:t>
+            </a:r>
+            <a:r>
               <a:rPr lang="ja-JP" altLang="en-US" sz="2400" dirty="0"/>
-              <a:t>ゲームに直接干渉するオブジェクトは同期する必要がありますが、</a:t>
+              <a:t>と違い、当たり判定や物理挙動の実装が簡単ですので、</a:t>
             </a:r>
             <a:endParaRPr lang="en-US" altLang="ja-JP" sz="2400" dirty="0"/>
           </a:p>
           <a:p>
             <a:r>
               <a:rPr lang="ja-JP" altLang="en-US" sz="2400" dirty="0"/>
-              <a:t>オンラインゲームには完ぺきに同期しなくてもよいオブジェクトもあります。</a:t>
-            </a:r>
-            <a:endParaRPr lang="en-US" altLang="ja-JP" sz="2400" dirty="0"/>
-          </a:p>
-          <a:p>
-            <a:endParaRPr lang="en-US" altLang="ja-JP" sz="2400" dirty="0"/>
-          </a:p>
-          <a:p>
-            <a:r>
-              <a:rPr lang="ja-JP" altLang="en-US" sz="2400" b="1" dirty="0">
-                <a:solidFill>
-                  <a:srgbClr val="FF0000"/>
-                </a:solidFill>
-              </a:rPr>
-              <a:t>■例</a:t>
-            </a:r>
-            <a:endParaRPr lang="en-US" altLang="ja-JP" sz="2400" b="1" dirty="0">
-              <a:solidFill>
-                <a:srgbClr val="FF0000"/>
-              </a:solidFill>
-            </a:endParaRPr>
-          </a:p>
-          <a:p>
-            <a:r>
-              <a:rPr lang="ja-JP" altLang="en-US" sz="2400" dirty="0"/>
-              <a:t>・エフェクト</a:t>
-            </a:r>
-            <a:endParaRPr lang="en-US" altLang="ja-JP" sz="2400" dirty="0"/>
-          </a:p>
-          <a:p>
-            <a:r>
-              <a:rPr lang="ja-JP" altLang="en-US" sz="2400" dirty="0"/>
-              <a:t>・</a:t>
-            </a:r>
-            <a:r>
-              <a:rPr lang="en-US" altLang="ja-JP" sz="2400" dirty="0"/>
-              <a:t>SE</a:t>
-            </a:r>
-            <a:r>
-              <a:rPr lang="ja-JP" altLang="en-US" sz="2400" dirty="0"/>
-              <a:t>再生</a:t>
-            </a:r>
-            <a:endParaRPr lang="en-US" altLang="ja-JP" sz="2400" dirty="0"/>
-          </a:p>
-          <a:p>
-            <a:r>
-              <a:rPr lang="ja-JP" altLang="en-US" sz="2400" dirty="0"/>
-              <a:t>・カメラ演出</a:t>
-            </a:r>
-            <a:endParaRPr lang="en-US" altLang="ja-JP" sz="2400" dirty="0"/>
-          </a:p>
-          <a:p>
-            <a:r>
-              <a:rPr lang="ja-JP" altLang="en-US" sz="2400" dirty="0"/>
-              <a:t>など</a:t>
+              <a:t>本格的なゲームを制作できます。</a:t>
             </a:r>
             <a:endParaRPr lang="en-US" altLang="ja-JP" sz="2400" dirty="0"/>
           </a:p>
@@ -3758,163 +3711,6 @@
     <p:extLst>
       <p:ext uri="{BB962C8B-B14F-4D97-AF65-F5344CB8AC3E}">
         <p14:creationId xmlns:p14="http://schemas.microsoft.com/office/powerpoint/2010/main" val="410028988"/>
-      </p:ext>
-    </p:extLst>
-  </p:cSld>
-  <p:clrMapOvr>
-    <a:masterClrMapping/>
-  </p:clrMapOvr>
-</p:sld>
-</file>
-
-<file path=ppt/slides/slide2.xml><?xml version="1.0" encoding="utf-8"?>
-<p:sld xmlns:a="http://schemas.openxmlformats.org/drawingml/2006/main" xmlns:r="http://schemas.openxmlformats.org/officeDocument/2006/relationships" xmlns:p="http://schemas.openxmlformats.org/presentationml/2006/main">
-  <p:cSld>
-    <p:spTree>
-      <p:nvGrpSpPr>
-        <p:cNvPr id="1" name=""/>
-        <p:cNvGrpSpPr/>
-        <p:nvPr/>
-      </p:nvGrpSpPr>
-      <p:grpSpPr>
-        <a:xfrm>
-          <a:off x="0" y="0"/>
-          <a:ext cx="0" cy="0"/>
-          <a:chOff x="0" y="0"/>
-          <a:chExt cx="0" cy="0"/>
-        </a:xfrm>
-      </p:grpSpPr>
-      <p:sp>
-        <p:nvSpPr>
-          <p:cNvPr id="4" name="テキスト ボックス 3">
-            <a:extLst>
-              <a:ext uri="{FF2B5EF4-FFF2-40B4-BE49-F238E27FC236}">
-                <a16:creationId xmlns:a16="http://schemas.microsoft.com/office/drawing/2014/main" id="{5A13BF46-B8C5-48AA-8308-C9ECFF431A18}"/>
-              </a:ext>
-            </a:extLst>
-          </p:cNvPr>
-          <p:cNvSpPr txBox="1"/>
-          <p:nvPr/>
-        </p:nvSpPr>
-        <p:spPr>
-          <a:xfrm>
-            <a:off x="567542" y="491954"/>
-            <a:ext cx="2646878" cy="584775"/>
-          </a:xfrm>
-          <a:prstGeom prst="rect">
-            <a:avLst/>
-          </a:prstGeom>
-          <a:noFill/>
-        </p:spPr>
-        <p:txBody>
-          <a:bodyPr wrap="none" rtlCol="0">
-            <a:spAutoFit/>
-          </a:bodyPr>
-          <a:lstStyle/>
-          <a:p>
-            <a:r>
-              <a:rPr kumimoji="1" lang="ja-JP" altLang="en-US" sz="3200" b="1" u="sng" dirty="0"/>
-              <a:t>イベント同期</a:t>
-            </a:r>
-          </a:p>
-        </p:txBody>
-      </p:sp>
-      <p:sp>
-        <p:nvSpPr>
-          <p:cNvPr id="6" name="テキスト ボックス 5">
-            <a:extLst>
-              <a:ext uri="{FF2B5EF4-FFF2-40B4-BE49-F238E27FC236}">
-                <a16:creationId xmlns:a16="http://schemas.microsoft.com/office/drawing/2014/main" id="{55830AD6-028B-4C4E-80BF-B70DFC1C3A46}"/>
-              </a:ext>
-            </a:extLst>
-          </p:cNvPr>
-          <p:cNvSpPr txBox="1"/>
-          <p:nvPr/>
-        </p:nvSpPr>
-        <p:spPr>
-          <a:xfrm>
-            <a:off x="567542" y="1216429"/>
-            <a:ext cx="9454832" cy="1938992"/>
-          </a:xfrm>
-          <a:prstGeom prst="rect">
-            <a:avLst/>
-          </a:prstGeom>
-          <a:noFill/>
-        </p:spPr>
-        <p:txBody>
-          <a:bodyPr wrap="none" rtlCol="0">
-            <a:spAutoFit/>
-          </a:bodyPr>
-          <a:lstStyle/>
-          <a:p>
-            <a:r>
-              <a:rPr lang="ja-JP" altLang="en-US" sz="2400" b="1" dirty="0">
-                <a:solidFill>
-                  <a:srgbClr val="FF0000"/>
-                </a:solidFill>
-              </a:rPr>
-              <a:t>タイミングや位置を完ぺきに同期しなくてもよいもの</a:t>
-            </a:r>
-            <a:r>
-              <a:rPr lang="ja-JP" altLang="en-US" sz="2400" dirty="0"/>
-              <a:t>まで、</a:t>
-            </a:r>
-            <a:endParaRPr lang="en-US" altLang="ja-JP" sz="2400" dirty="0"/>
-          </a:p>
-          <a:p>
-            <a:r>
-              <a:rPr lang="en-US" altLang="ja-JP" sz="2400" dirty="0"/>
-              <a:t>Spawn</a:t>
-            </a:r>
-            <a:r>
-              <a:rPr lang="ja-JP" altLang="en-US" sz="2400" dirty="0"/>
-              <a:t>関数で同期させると、処理コストの負担が大きくなります。</a:t>
-            </a:r>
-            <a:endParaRPr lang="en-US" altLang="ja-JP" sz="2400" dirty="0"/>
-          </a:p>
-          <a:p>
-            <a:r>
-              <a:rPr lang="ja-JP" altLang="en-US" sz="2400" dirty="0"/>
-              <a:t>このような場合は</a:t>
-            </a:r>
-            <a:r>
-              <a:rPr lang="en-US" altLang="ja-JP" sz="2400" b="1" dirty="0">
-                <a:solidFill>
-                  <a:srgbClr val="FF0000"/>
-                </a:solidFill>
-              </a:rPr>
-              <a:t>RPC</a:t>
-            </a:r>
-            <a:r>
-              <a:rPr lang="ja-JP" altLang="en-US" sz="2400" b="1" dirty="0">
-                <a:solidFill>
-                  <a:srgbClr val="FF0000"/>
-                </a:solidFill>
-              </a:rPr>
-              <a:t>（イベント同期）</a:t>
-            </a:r>
-            <a:r>
-              <a:rPr lang="ja-JP" altLang="en-US" sz="2400" dirty="0"/>
-              <a:t>を使用します。</a:t>
-            </a:r>
-            <a:endParaRPr lang="en-US" altLang="ja-JP" sz="2400" dirty="0"/>
-          </a:p>
-          <a:p>
-            <a:endParaRPr lang="en-US" altLang="ja-JP" sz="2400" dirty="0"/>
-          </a:p>
-          <a:p>
-            <a:r>
-              <a:rPr lang="ja-JP" altLang="en-US" sz="2400" dirty="0"/>
-              <a:t>弾丸のヒットエフェクトで練習します。</a:t>
-            </a:r>
-            <a:endParaRPr lang="en-US" altLang="ja-JP" sz="2400" dirty="0"/>
-          </a:p>
-        </p:txBody>
-      </p:sp>
-    </p:spTree>
-    <p:extLst>
-      <p:ext uri="{BB962C8B-B14F-4D97-AF65-F5344CB8AC3E}">
-        <p14:creationId xmlns:p14="http://schemas.microsoft.com/office/powerpoint/2010/main" val="1315831816"/>
       </p:ext>
     </p:extLst>
   </p:cSld>
